--- a/Peperwork/HMS PPT Final.pptx
+++ b/Peperwork/HMS PPT Final.pptx
@@ -13,17 +13,20 @@
     <p:sldId id="285" r:id="rId7"/>
     <p:sldId id="287" r:id="rId8"/>
     <p:sldId id="288" r:id="rId9"/>
-    <p:sldId id="291" r:id="rId10"/>
-    <p:sldId id="292" r:id="rId11"/>
-    <p:sldId id="293" r:id="rId12"/>
-    <p:sldId id="294" r:id="rId13"/>
-    <p:sldId id="274" r:id="rId14"/>
-    <p:sldId id="276" r:id="rId15"/>
-    <p:sldId id="275" r:id="rId16"/>
-    <p:sldId id="277" r:id="rId17"/>
-    <p:sldId id="278" r:id="rId18"/>
-    <p:sldId id="279" r:id="rId19"/>
-    <p:sldId id="284" r:id="rId20"/>
+    <p:sldId id="296" r:id="rId10"/>
+    <p:sldId id="297" r:id="rId11"/>
+    <p:sldId id="298" r:id="rId12"/>
+    <p:sldId id="299" r:id="rId13"/>
+    <p:sldId id="300" r:id="rId14"/>
+    <p:sldId id="301" r:id="rId15"/>
+    <p:sldId id="302" r:id="rId16"/>
+    <p:sldId id="274" r:id="rId17"/>
+    <p:sldId id="276" r:id="rId18"/>
+    <p:sldId id="275" r:id="rId19"/>
+    <p:sldId id="277" r:id="rId20"/>
+    <p:sldId id="278" r:id="rId21"/>
+    <p:sldId id="279" r:id="rId22"/>
+    <p:sldId id="284" r:id="rId23"/>
   </p:sldIdLst>
   <p:sldSz cx="9144000" cy="6858000" type="screen4x3"/>
   <p:notesSz cx="9144000" cy="6858000"/>
@@ -345,7 +348,7 @@
           <a:p>
             <a:fld id="{1D8BD707-D9CF-40AE-B4C6-C98DA3205C09}" type="datetimeFigureOut">
               <a:rPr lang="en-US"/>
-              <a:t>07-Mar-26</a:t>
+              <a:t>10-Apr-26</a:t>
             </a:fld>
             <a:endParaRPr lang="en-US"/>
           </a:p>
@@ -516,7 +519,7 @@
           <a:p>
             <a:fld id="{1D8BD707-D9CF-40AE-B4C6-C98DA3205C09}" type="datetimeFigureOut">
               <a:rPr lang="en-US"/>
-              <a:t>07-Mar-26</a:t>
+              <a:t>10-Apr-26</a:t>
             </a:fld>
             <a:endParaRPr lang="en-US"/>
           </a:p>
@@ -730,7 +733,7 @@
           <a:p>
             <a:fld id="{1D8BD707-D9CF-40AE-B4C6-C98DA3205C09}" type="datetimeFigureOut">
               <a:rPr lang="en-US"/>
-              <a:t>07-Mar-26</a:t>
+              <a:t>10-Apr-26</a:t>
             </a:fld>
             <a:endParaRPr lang="en-US"/>
           </a:p>
@@ -878,7 +881,7 @@
           <a:p>
             <a:fld id="{1D8BD707-D9CF-40AE-B4C6-C98DA3205C09}" type="datetimeFigureOut">
               <a:rPr lang="en-US"/>
-              <a:t>07-Mar-26</a:t>
+              <a:t>10-Apr-26</a:t>
             </a:fld>
             <a:endParaRPr lang="en-US"/>
           </a:p>
@@ -997,7 +1000,7 @@
           <a:p>
             <a:fld id="{1D8BD707-D9CF-40AE-B4C6-C98DA3205C09}" type="datetimeFigureOut">
               <a:rPr lang="en-US"/>
-              <a:t>07-Mar-26</a:t>
+              <a:t>10-Apr-26</a:t>
             </a:fld>
             <a:endParaRPr lang="en-US"/>
           </a:p>
@@ -1216,7 +1219,7 @@
           <a:p>
             <a:fld id="{1D8BD707-D9CF-40AE-B4C6-C98DA3205C09}" type="datetimeFigureOut">
               <a:rPr lang="en-US"/>
-              <a:t>07-Mar-26</a:t>
+              <a:t>10-Apr-26</a:t>
             </a:fld>
             <a:endParaRPr lang="en-US"/>
           </a:p>
@@ -2127,73 +2130,12 @@
           <a:chExt cx="0" cy="0"/>
         </a:xfrm>
       </p:grpSpPr>
-      <p:sp>
-        <p:nvSpPr>
-          <p:cNvPr id="7" name="Title 6">
+      <p:pic>
+        <p:nvPicPr>
+          <p:cNvPr id="3" name="Picture 2">
             <a:extLst>
               <a:ext uri="{FF2B5EF4-FFF2-40B4-BE49-F238E27FC236}">
-                <a16:creationId xmlns:a16="http://schemas.microsoft.com/office/drawing/2014/main" id="{4C5359B0-CAAB-44C8-8E1B-E059304D842A}"/>
-              </a:ext>
-            </a:extLst>
-          </p:cNvPr>
-          <p:cNvSpPr>
-            <a:spLocks noGrp="1"/>
-          </p:cNvSpPr>
-          <p:nvPr>
-            <p:ph type="title"/>
-          </p:nvPr>
-        </p:nvSpPr>
-        <p:spPr>
-          <a:xfrm>
-            <a:off x="533400" y="616490"/>
-            <a:ext cx="7114786" cy="553998"/>
-          </a:xfrm>
-        </p:spPr>
-        <p:txBody>
-          <a:bodyPr/>
-          <a:lstStyle/>
-          <a:p>
-            <a:r>
-              <a:rPr lang="en-US" dirty="0">
-                <a:latin typeface="Times New Roman" panose="02020603050405020304" pitchFamily="18" charset="0"/>
-                <a:cs typeface="Times New Roman" panose="02020603050405020304" pitchFamily="18" charset="0"/>
-              </a:rPr>
-              <a:t>Prototype</a:t>
-            </a:r>
-          </a:p>
-        </p:txBody>
-      </p:sp>
-      <p:sp>
-        <p:nvSpPr>
-          <p:cNvPr id="8" name="Text Placeholder 7">
-            <a:extLst>
-              <a:ext uri="{FF2B5EF4-FFF2-40B4-BE49-F238E27FC236}">
-                <a16:creationId xmlns:a16="http://schemas.microsoft.com/office/drawing/2014/main" id="{20F2AEFC-3548-4E7B-8CD7-52001CAA63EF}"/>
-              </a:ext>
-            </a:extLst>
-          </p:cNvPr>
-          <p:cNvSpPr>
-            <a:spLocks noGrp="1"/>
-          </p:cNvSpPr>
-          <p:nvPr>
-            <p:ph type="body" idx="1"/>
-          </p:nvPr>
-        </p:nvSpPr>
-        <p:spPr/>
-        <p:txBody>
-          <a:bodyPr/>
-          <a:lstStyle/>
-          <a:p>
-            <a:endParaRPr lang="en-US" dirty="0"/>
-          </a:p>
-        </p:txBody>
-      </p:sp>
-      <p:pic>
-        <p:nvPicPr>
-          <p:cNvPr id="10" name="Picture 9">
-            <a:extLst>
-              <a:ext uri="{FF2B5EF4-FFF2-40B4-BE49-F238E27FC236}">
-                <a16:creationId xmlns:a16="http://schemas.microsoft.com/office/drawing/2014/main" id="{BF7FE6F8-E365-4874-895D-867B61F989C3}"/>
+                <a16:creationId xmlns:a16="http://schemas.microsoft.com/office/drawing/2014/main" id="{2D7A56FA-8EE8-ABEA-A2E0-0A5DE6736FA9}"/>
               </a:ext>
             </a:extLst>
           </p:cNvPr>
@@ -2204,14 +2146,15 @@
         </p:nvPicPr>
         <p:blipFill>
           <a:blip r:embed="rId2"/>
+          <a:srcRect t="11920" b="5960"/>
           <a:stretch>
             <a:fillRect/>
           </a:stretch>
         </p:blipFill>
         <p:spPr>
           <a:xfrm>
-            <a:off x="457200" y="1837046"/>
-            <a:ext cx="8229600" cy="4006867"/>
+            <a:off x="0" y="1219200"/>
+            <a:ext cx="9144000" cy="4724400"/>
           </a:xfrm>
           <a:prstGeom prst="rect">
             <a:avLst/>
@@ -2221,7 +2164,7 @@
     </p:spTree>
     <p:extLst>
       <p:ext uri="{BB962C8B-B14F-4D97-AF65-F5344CB8AC3E}">
-        <p14:creationId xmlns:p14="http://schemas.microsoft.com/office/powerpoint/2010/main" val="3642660502"/>
+        <p14:creationId xmlns:p14="http://schemas.microsoft.com/office/powerpoint/2010/main" val="1664022651"/>
       </p:ext>
     </p:extLst>
   </p:cSld>
@@ -2248,73 +2191,12 @@
           <a:chExt cx="0" cy="0"/>
         </a:xfrm>
       </p:grpSpPr>
-      <p:sp>
-        <p:nvSpPr>
-          <p:cNvPr id="2" name="Title 1">
+      <p:pic>
+        <p:nvPicPr>
+          <p:cNvPr id="3" name="Picture 2">
             <a:extLst>
               <a:ext uri="{FF2B5EF4-FFF2-40B4-BE49-F238E27FC236}">
-                <a16:creationId xmlns:a16="http://schemas.microsoft.com/office/drawing/2014/main" id="{000DEAB9-D089-4F3B-9F77-5F9F0EDCA40A}"/>
-              </a:ext>
-            </a:extLst>
-          </p:cNvPr>
-          <p:cNvSpPr>
-            <a:spLocks noGrp="1"/>
-          </p:cNvSpPr>
-          <p:nvPr>
-            <p:ph type="title"/>
-          </p:nvPr>
-        </p:nvSpPr>
-        <p:spPr>
-          <a:xfrm>
-            <a:off x="423672" y="626355"/>
-            <a:ext cx="7114786" cy="553998"/>
-          </a:xfrm>
-        </p:spPr>
-        <p:txBody>
-          <a:bodyPr/>
-          <a:lstStyle/>
-          <a:p>
-            <a:r>
-              <a:rPr lang="en-US" dirty="0">
-                <a:latin typeface="Times New Roman" panose="02020603050405020304" pitchFamily="18" charset="0"/>
-                <a:cs typeface="Times New Roman" panose="02020603050405020304" pitchFamily="18" charset="0"/>
-              </a:rPr>
-              <a:t>Prototype</a:t>
-            </a:r>
-          </a:p>
-        </p:txBody>
-      </p:sp>
-      <p:sp>
-        <p:nvSpPr>
-          <p:cNvPr id="3" name="Text Placeholder 2">
-            <a:extLst>
-              <a:ext uri="{FF2B5EF4-FFF2-40B4-BE49-F238E27FC236}">
-                <a16:creationId xmlns:a16="http://schemas.microsoft.com/office/drawing/2014/main" id="{0C60DA64-54D7-4A8F-BB6F-87C067BFD15C}"/>
-              </a:ext>
-            </a:extLst>
-          </p:cNvPr>
-          <p:cNvSpPr>
-            <a:spLocks noGrp="1"/>
-          </p:cNvSpPr>
-          <p:nvPr>
-            <p:ph type="body" idx="1"/>
-          </p:nvPr>
-        </p:nvSpPr>
-        <p:spPr/>
-        <p:txBody>
-          <a:bodyPr/>
-          <a:lstStyle/>
-          <a:p>
-            <a:endParaRPr lang="en-US" dirty="0"/>
-          </a:p>
-        </p:txBody>
-      </p:sp>
-      <p:pic>
-        <p:nvPicPr>
-          <p:cNvPr id="5" name="Picture 4">
-            <a:extLst>
-              <a:ext uri="{FF2B5EF4-FFF2-40B4-BE49-F238E27FC236}">
-                <a16:creationId xmlns:a16="http://schemas.microsoft.com/office/drawing/2014/main" id="{990534C2-246F-4171-A2DD-B1D350A7BBC7}"/>
+                <a16:creationId xmlns:a16="http://schemas.microsoft.com/office/drawing/2014/main" id="{52200C3C-49D1-7590-5B7D-8025E608EF96}"/>
               </a:ext>
             </a:extLst>
           </p:cNvPr>
@@ -2325,14 +2207,15 @@
         </p:nvPicPr>
         <p:blipFill>
           <a:blip r:embed="rId2"/>
+          <a:srcRect t="12668" b="6000"/>
           <a:stretch>
             <a:fillRect/>
           </a:stretch>
         </p:blipFill>
         <p:spPr>
           <a:xfrm>
-            <a:off x="457200" y="1676401"/>
-            <a:ext cx="8153400" cy="4041822"/>
+            <a:off x="0" y="1295400"/>
+            <a:ext cx="9144000" cy="4648200"/>
           </a:xfrm>
           <a:prstGeom prst="rect">
             <a:avLst/>
@@ -2342,7 +2225,7 @@
     </p:spTree>
     <p:extLst>
       <p:ext uri="{BB962C8B-B14F-4D97-AF65-F5344CB8AC3E}">
-        <p14:creationId xmlns:p14="http://schemas.microsoft.com/office/powerpoint/2010/main" val="2167733805"/>
+        <p14:creationId xmlns:p14="http://schemas.microsoft.com/office/powerpoint/2010/main" val="1056321397"/>
       </p:ext>
     </p:extLst>
   </p:cSld>
@@ -2369,103 +2252,12 @@
           <a:chExt cx="0" cy="0"/>
         </a:xfrm>
       </p:grpSpPr>
-      <p:sp>
-        <p:nvSpPr>
-          <p:cNvPr id="2" name="Title 1">
+      <p:pic>
+        <p:nvPicPr>
+          <p:cNvPr id="3" name="Picture 2">
             <a:extLst>
               <a:ext uri="{FF2B5EF4-FFF2-40B4-BE49-F238E27FC236}">
-                <a16:creationId xmlns:a16="http://schemas.microsoft.com/office/drawing/2014/main" id="{4DD337AD-CFE0-4B58-96B8-7B4A80DD68FE}"/>
-              </a:ext>
-            </a:extLst>
-          </p:cNvPr>
-          <p:cNvSpPr>
-            <a:spLocks noGrp="1"/>
-          </p:cNvSpPr>
-          <p:nvPr>
-            <p:ph type="title"/>
-          </p:nvPr>
-        </p:nvSpPr>
-        <p:spPr>
-          <a:xfrm>
-            <a:off x="609600" y="440875"/>
-            <a:ext cx="7114786" cy="1070927"/>
-          </a:xfrm>
-        </p:spPr>
-        <p:txBody>
-          <a:bodyPr/>
-          <a:lstStyle/>
-          <a:p>
-            <a:r>
-              <a:rPr lang="en-US" dirty="0">
-                <a:latin typeface="Times New Roman" panose="02020603050405020304" pitchFamily="18" charset="0"/>
-                <a:cs typeface="Times New Roman" panose="02020603050405020304" pitchFamily="18" charset="0"/>
-              </a:rPr>
-              <a:t>Prototype</a:t>
-            </a:r>
-            <a:endParaRPr lang="en-US" dirty="0"/>
-          </a:p>
-        </p:txBody>
-      </p:sp>
-      <p:pic>
-        <p:nvPicPr>
-          <p:cNvPr id="9" name="Content Placeholder 8">
-            <a:extLst>
-              <a:ext uri="{FF2B5EF4-FFF2-40B4-BE49-F238E27FC236}">
-                <a16:creationId xmlns:a16="http://schemas.microsoft.com/office/drawing/2014/main" id="{141A82AF-18EB-4E71-B97B-598CF62CA6AA}"/>
-              </a:ext>
-            </a:extLst>
-          </p:cNvPr>
-          <p:cNvPicPr>
-            <a:picLocks noGrp="1" noChangeAspect="1"/>
-          </p:cNvPicPr>
-          <p:nvPr>
-            <p:ph sz="half" idx="2"/>
-          </p:nvPr>
-        </p:nvPicPr>
-        <p:blipFill>
-          <a:blip r:embed="rId2"/>
-          <a:stretch>
-            <a:fillRect/>
-          </a:stretch>
-        </p:blipFill>
-        <p:spPr>
-          <a:xfrm>
-            <a:off x="457200" y="1446264"/>
-            <a:ext cx="3978275" cy="4649093"/>
-          </a:xfrm>
-        </p:spPr>
-      </p:pic>
-      <p:sp>
-        <p:nvSpPr>
-          <p:cNvPr id="7" name="Content Placeholder 6">
-            <a:extLst>
-              <a:ext uri="{FF2B5EF4-FFF2-40B4-BE49-F238E27FC236}">
-                <a16:creationId xmlns:a16="http://schemas.microsoft.com/office/drawing/2014/main" id="{619A7EAB-690D-43F7-8C85-C8FC05851AA6}"/>
-              </a:ext>
-            </a:extLst>
-          </p:cNvPr>
-          <p:cNvSpPr>
-            <a:spLocks noGrp="1"/>
-          </p:cNvSpPr>
-          <p:nvPr>
-            <p:ph sz="half" idx="3"/>
-          </p:nvPr>
-        </p:nvSpPr>
-        <p:spPr/>
-        <p:txBody>
-          <a:bodyPr/>
-          <a:lstStyle/>
-          <a:p>
-            <a:endParaRPr lang="en-US"/>
-          </a:p>
-        </p:txBody>
-      </p:sp>
-      <p:pic>
-        <p:nvPicPr>
-          <p:cNvPr id="5" name="Picture 4">
-            <a:extLst>
-              <a:ext uri="{FF2B5EF4-FFF2-40B4-BE49-F238E27FC236}">
-                <a16:creationId xmlns:a16="http://schemas.microsoft.com/office/drawing/2014/main" id="{939066BE-B033-4CF8-B105-7F34171E7589}"/>
+                <a16:creationId xmlns:a16="http://schemas.microsoft.com/office/drawing/2014/main" id="{E4F92338-02CC-44C9-A97B-3B202659CA8A}"/>
               </a:ext>
             </a:extLst>
           </p:cNvPr>
@@ -2475,15 +2267,16 @@
           <p:nvPr/>
         </p:nvPicPr>
         <p:blipFill>
-          <a:blip r:embed="rId3"/>
+          <a:blip r:embed="rId2"/>
+          <a:srcRect t="12666" b="6000"/>
           <a:stretch>
             <a:fillRect/>
           </a:stretch>
         </p:blipFill>
         <p:spPr>
           <a:xfrm>
-            <a:off x="4709160" y="1446264"/>
-            <a:ext cx="3977640" cy="4649093"/>
+            <a:off x="0" y="1295400"/>
+            <a:ext cx="9144000" cy="4648200"/>
           </a:xfrm>
           <a:prstGeom prst="rect">
             <a:avLst/>
@@ -2493,7 +2286,7 @@
     </p:spTree>
     <p:extLst>
       <p:ext uri="{BB962C8B-B14F-4D97-AF65-F5344CB8AC3E}">
-        <p14:creationId xmlns:p14="http://schemas.microsoft.com/office/powerpoint/2010/main" val="1498265516"/>
+        <p14:creationId xmlns:p14="http://schemas.microsoft.com/office/powerpoint/2010/main" val="2447287132"/>
       </p:ext>
     </p:extLst>
   </p:cSld>
@@ -2504,6 +2297,189 @@
 </file>
 
 <file path=ppt/slides/slide13.xml><?xml version="1.0" encoding="utf-8"?>
+<p:sld xmlns:a="http://schemas.openxmlformats.org/drawingml/2006/main" xmlns:r="http://schemas.openxmlformats.org/officeDocument/2006/relationships" xmlns:p="http://schemas.openxmlformats.org/presentationml/2006/main">
+  <p:cSld>
+    <p:spTree>
+      <p:nvGrpSpPr>
+        <p:cNvPr id="1" name=""/>
+        <p:cNvGrpSpPr/>
+        <p:nvPr/>
+      </p:nvGrpSpPr>
+      <p:grpSpPr>
+        <a:xfrm>
+          <a:off x="0" y="0"/>
+          <a:ext cx="0" cy="0"/>
+          <a:chOff x="0" y="0"/>
+          <a:chExt cx="0" cy="0"/>
+        </a:xfrm>
+      </p:grpSpPr>
+      <p:pic>
+        <p:nvPicPr>
+          <p:cNvPr id="3" name="Picture 2">
+            <a:extLst>
+              <a:ext uri="{FF2B5EF4-FFF2-40B4-BE49-F238E27FC236}">
+                <a16:creationId xmlns:a16="http://schemas.microsoft.com/office/drawing/2014/main" id="{0C56B411-9B85-887B-A0C4-C1E635F806DC}"/>
+              </a:ext>
+            </a:extLst>
+          </p:cNvPr>
+          <p:cNvPicPr>
+            <a:picLocks noChangeAspect="1"/>
+          </p:cNvPicPr>
+          <p:nvPr/>
+        </p:nvPicPr>
+        <p:blipFill>
+          <a:blip r:embed="rId2"/>
+          <a:srcRect t="12666" b="6000"/>
+          <a:stretch>
+            <a:fillRect/>
+          </a:stretch>
+        </p:blipFill>
+        <p:spPr>
+          <a:xfrm>
+            <a:off x="0" y="1295400"/>
+            <a:ext cx="9144000" cy="4648200"/>
+          </a:xfrm>
+          <a:prstGeom prst="rect">
+            <a:avLst/>
+          </a:prstGeom>
+        </p:spPr>
+      </p:pic>
+    </p:spTree>
+    <p:extLst>
+      <p:ext uri="{BB962C8B-B14F-4D97-AF65-F5344CB8AC3E}">
+        <p14:creationId xmlns:p14="http://schemas.microsoft.com/office/powerpoint/2010/main" val="451847510"/>
+      </p:ext>
+    </p:extLst>
+  </p:cSld>
+  <p:clrMapOvr>
+    <a:masterClrMapping/>
+  </p:clrMapOvr>
+</p:sld>
+</file>
+
+<file path=ppt/slides/slide14.xml><?xml version="1.0" encoding="utf-8"?>
+<p:sld xmlns:a="http://schemas.openxmlformats.org/drawingml/2006/main" xmlns:r="http://schemas.openxmlformats.org/officeDocument/2006/relationships" xmlns:p="http://schemas.openxmlformats.org/presentationml/2006/main">
+  <p:cSld>
+    <p:spTree>
+      <p:nvGrpSpPr>
+        <p:cNvPr id="1" name=""/>
+        <p:cNvGrpSpPr/>
+        <p:nvPr/>
+      </p:nvGrpSpPr>
+      <p:grpSpPr>
+        <a:xfrm>
+          <a:off x="0" y="0"/>
+          <a:ext cx="0" cy="0"/>
+          <a:chOff x="0" y="0"/>
+          <a:chExt cx="0" cy="0"/>
+        </a:xfrm>
+      </p:grpSpPr>
+      <p:pic>
+        <p:nvPicPr>
+          <p:cNvPr id="3" name="Picture 2">
+            <a:extLst>
+              <a:ext uri="{FF2B5EF4-FFF2-40B4-BE49-F238E27FC236}">
+                <a16:creationId xmlns:a16="http://schemas.microsoft.com/office/drawing/2014/main" id="{F61DC748-D9E0-4D6C-FE01-E38C5A8DE4F8}"/>
+              </a:ext>
+            </a:extLst>
+          </p:cNvPr>
+          <p:cNvPicPr>
+            <a:picLocks noChangeAspect="1"/>
+          </p:cNvPicPr>
+          <p:nvPr/>
+        </p:nvPicPr>
+        <p:blipFill>
+          <a:blip r:embed="rId2"/>
+          <a:srcRect t="12667" b="4667"/>
+          <a:stretch>
+            <a:fillRect/>
+          </a:stretch>
+        </p:blipFill>
+        <p:spPr>
+          <a:xfrm>
+            <a:off x="0" y="1295400"/>
+            <a:ext cx="9144000" cy="4724400"/>
+          </a:xfrm>
+          <a:prstGeom prst="rect">
+            <a:avLst/>
+          </a:prstGeom>
+        </p:spPr>
+      </p:pic>
+    </p:spTree>
+    <p:extLst>
+      <p:ext uri="{BB962C8B-B14F-4D97-AF65-F5344CB8AC3E}">
+        <p14:creationId xmlns:p14="http://schemas.microsoft.com/office/powerpoint/2010/main" val="2896260389"/>
+      </p:ext>
+    </p:extLst>
+  </p:cSld>
+  <p:clrMapOvr>
+    <a:masterClrMapping/>
+  </p:clrMapOvr>
+</p:sld>
+</file>
+
+<file path=ppt/slides/slide15.xml><?xml version="1.0" encoding="utf-8"?>
+<p:sld xmlns:a="http://schemas.openxmlformats.org/drawingml/2006/main" xmlns:r="http://schemas.openxmlformats.org/officeDocument/2006/relationships" xmlns:p="http://schemas.openxmlformats.org/presentationml/2006/main">
+  <p:cSld>
+    <p:spTree>
+      <p:nvGrpSpPr>
+        <p:cNvPr id="1" name=""/>
+        <p:cNvGrpSpPr/>
+        <p:nvPr/>
+      </p:nvGrpSpPr>
+      <p:grpSpPr>
+        <a:xfrm>
+          <a:off x="0" y="0"/>
+          <a:ext cx="0" cy="0"/>
+          <a:chOff x="0" y="0"/>
+          <a:chExt cx="0" cy="0"/>
+        </a:xfrm>
+      </p:grpSpPr>
+      <p:pic>
+        <p:nvPicPr>
+          <p:cNvPr id="3" name="Picture 2">
+            <a:extLst>
+              <a:ext uri="{FF2B5EF4-FFF2-40B4-BE49-F238E27FC236}">
+                <a16:creationId xmlns:a16="http://schemas.microsoft.com/office/drawing/2014/main" id="{9B57ECF5-87FF-2314-CDB3-4B82C5D0C1E9}"/>
+              </a:ext>
+            </a:extLst>
+          </p:cNvPr>
+          <p:cNvPicPr>
+            <a:picLocks noChangeAspect="1"/>
+          </p:cNvPicPr>
+          <p:nvPr/>
+        </p:nvPicPr>
+        <p:blipFill>
+          <a:blip r:embed="rId2"/>
+          <a:srcRect t="12667" b="4667"/>
+          <a:stretch>
+            <a:fillRect/>
+          </a:stretch>
+        </p:blipFill>
+        <p:spPr>
+          <a:xfrm>
+            <a:off x="0" y="1295400"/>
+            <a:ext cx="9144000" cy="4724400"/>
+          </a:xfrm>
+          <a:prstGeom prst="rect">
+            <a:avLst/>
+          </a:prstGeom>
+        </p:spPr>
+      </p:pic>
+    </p:spTree>
+    <p:extLst>
+      <p:ext uri="{BB962C8B-B14F-4D97-AF65-F5344CB8AC3E}">
+        <p14:creationId xmlns:p14="http://schemas.microsoft.com/office/powerpoint/2010/main" val="324324983"/>
+      </p:ext>
+    </p:extLst>
+  </p:cSld>
+  <p:clrMapOvr>
+    <a:masterClrMapping/>
+  </p:clrMapOvr>
+</p:sld>
+</file>
+
+<file path=ppt/slides/slide16.xml><?xml version="1.0" encoding="utf-8"?>
 <p:sld xmlns:a="http://schemas.openxmlformats.org/drawingml/2006/main" xmlns:r="http://schemas.openxmlformats.org/officeDocument/2006/relationships" xmlns:p="http://schemas.openxmlformats.org/presentationml/2006/main">
   <p:cSld>
     <p:spTree>
@@ -2965,7 +2941,7 @@
 </p:sld>
 </file>
 
-<file path=ppt/slides/slide14.xml><?xml version="1.0" encoding="utf-8"?>
+<file path=ppt/slides/slide17.xml><?xml version="1.0" encoding="utf-8"?>
 <p:sld xmlns:a="http://schemas.openxmlformats.org/drawingml/2006/main" xmlns:r="http://schemas.openxmlformats.org/officeDocument/2006/relationships" xmlns:p="http://schemas.openxmlformats.org/presentationml/2006/main">
   <p:cSld>
     <p:spTree>
@@ -3501,7 +3477,7 @@
 </p:sld>
 </file>
 
-<file path=ppt/slides/slide15.xml><?xml version="1.0" encoding="utf-8"?>
+<file path=ppt/slides/slide18.xml><?xml version="1.0" encoding="utf-8"?>
 <p:sld xmlns:a="http://schemas.openxmlformats.org/drawingml/2006/main" xmlns:r="http://schemas.openxmlformats.org/officeDocument/2006/relationships" xmlns:p="http://schemas.openxmlformats.org/presentationml/2006/main">
   <p:cSld>
     <p:spTree>
@@ -4074,7 +4050,7 @@
 </p:sld>
 </file>
 
-<file path=ppt/slides/slide16.xml><?xml version="1.0" encoding="utf-8"?>
+<file path=ppt/slides/slide19.xml><?xml version="1.0" encoding="utf-8"?>
 <p:sld xmlns:a="http://schemas.openxmlformats.org/drawingml/2006/main" xmlns:r="http://schemas.openxmlformats.org/officeDocument/2006/relationships" xmlns:p="http://schemas.openxmlformats.org/presentationml/2006/main">
   <p:cSld>
     <p:spTree>
@@ -4515,609 +4491,6 @@
     <p:extLst>
       <p:ext uri="{BB962C8B-B14F-4D97-AF65-F5344CB8AC3E}">
         <p14:creationId xmlns:p14="http://schemas.microsoft.com/office/powerpoint/2010/main" val="902145196"/>
-      </p:ext>
-    </p:extLst>
-  </p:cSld>
-  <p:clrMapOvr>
-    <a:masterClrMapping/>
-  </p:clrMapOvr>
-</p:sld>
-</file>
-
-<file path=ppt/slides/slide17.xml><?xml version="1.0" encoding="utf-8"?>
-<p:sld xmlns:a="http://schemas.openxmlformats.org/drawingml/2006/main" xmlns:r="http://schemas.openxmlformats.org/officeDocument/2006/relationships" xmlns:p="http://schemas.openxmlformats.org/presentationml/2006/main">
-  <p:cSld>
-    <p:spTree>
-      <p:nvGrpSpPr>
-        <p:cNvPr id="1" name=""/>
-        <p:cNvGrpSpPr/>
-        <p:nvPr/>
-      </p:nvGrpSpPr>
-      <p:grpSpPr>
-        <a:xfrm>
-          <a:off x="0" y="0"/>
-          <a:ext cx="0" cy="0"/>
-          <a:chOff x="0" y="0"/>
-          <a:chExt cx="0" cy="0"/>
-        </a:xfrm>
-      </p:grpSpPr>
-      <p:sp>
-        <p:nvSpPr>
-          <p:cNvPr id="2" name="Title 1">
-            <a:extLst>
-              <a:ext uri="{FF2B5EF4-FFF2-40B4-BE49-F238E27FC236}">
-                <a16:creationId xmlns:a16="http://schemas.microsoft.com/office/drawing/2014/main" id="{DC02E607-25FE-1C88-DE6C-2E6BE4BA3961}"/>
-              </a:ext>
-            </a:extLst>
-          </p:cNvPr>
-          <p:cNvSpPr>
-            <a:spLocks noGrp="1"/>
-          </p:cNvSpPr>
-          <p:nvPr>
-            <p:ph type="title"/>
-          </p:nvPr>
-        </p:nvSpPr>
-        <p:spPr>
-          <a:xfrm>
-            <a:off x="376625" y="196024"/>
-            <a:ext cx="7114786" cy="553998"/>
-          </a:xfrm>
-        </p:spPr>
-        <p:txBody>
-          <a:bodyPr/>
-          <a:lstStyle/>
-          <a:p>
-            <a:r>
-              <a:rPr lang="en-IN" dirty="0">
-                <a:latin typeface="Times New Roman" panose="02020603050405020304" pitchFamily="18" charset="0"/>
-                <a:cs typeface="Times New Roman" panose="02020603050405020304" pitchFamily="18" charset="0"/>
-              </a:rPr>
-              <a:t>Future</a:t>
-            </a:r>
-            <a:r>
-              <a:rPr lang="en-IN" spc="-130" dirty="0">
-                <a:latin typeface="Times New Roman" panose="02020603050405020304" pitchFamily="18" charset="0"/>
-                <a:cs typeface="Times New Roman" panose="02020603050405020304" pitchFamily="18" charset="0"/>
-              </a:rPr>
-              <a:t> </a:t>
-            </a:r>
-            <a:r>
-              <a:rPr lang="en-IN" dirty="0">
-                <a:latin typeface="Times New Roman" panose="02020603050405020304" pitchFamily="18" charset="0"/>
-                <a:cs typeface="Times New Roman" panose="02020603050405020304" pitchFamily="18" charset="0"/>
-              </a:rPr>
-              <a:t>Work</a:t>
-            </a:r>
-            <a:r>
-              <a:rPr lang="en-IN" spc="-125" dirty="0">
-                <a:latin typeface="Times New Roman" panose="02020603050405020304" pitchFamily="18" charset="0"/>
-                <a:cs typeface="Times New Roman" panose="02020603050405020304" pitchFamily="18" charset="0"/>
-              </a:rPr>
-              <a:t> </a:t>
-            </a:r>
-            <a:r>
-              <a:rPr lang="en-IN" dirty="0">
-                <a:latin typeface="Times New Roman" panose="02020603050405020304" pitchFamily="18" charset="0"/>
-                <a:cs typeface="Times New Roman" panose="02020603050405020304" pitchFamily="18" charset="0"/>
-              </a:rPr>
-              <a:t>&amp;</a:t>
-            </a:r>
-            <a:r>
-              <a:rPr lang="en-IN" spc="-125" dirty="0">
-                <a:latin typeface="Times New Roman" panose="02020603050405020304" pitchFamily="18" charset="0"/>
-                <a:cs typeface="Times New Roman" panose="02020603050405020304" pitchFamily="18" charset="0"/>
-              </a:rPr>
-              <a:t> </a:t>
-            </a:r>
-            <a:r>
-              <a:rPr lang="en-IN" spc="-10" dirty="0">
-                <a:latin typeface="Times New Roman" panose="02020603050405020304" pitchFamily="18" charset="0"/>
-                <a:cs typeface="Times New Roman" panose="02020603050405020304" pitchFamily="18" charset="0"/>
-              </a:rPr>
-              <a:t>Conclusion</a:t>
-            </a:r>
-            <a:endParaRPr lang="en-IN" dirty="0">
-              <a:latin typeface="Times New Roman" panose="02020603050405020304" pitchFamily="18" charset="0"/>
-              <a:cs typeface="Times New Roman" panose="02020603050405020304" pitchFamily="18" charset="0"/>
-            </a:endParaRPr>
-          </a:p>
-        </p:txBody>
-      </p:sp>
-      <p:sp>
-        <p:nvSpPr>
-          <p:cNvPr id="3" name="Text Placeholder 2">
-            <a:extLst>
-              <a:ext uri="{FF2B5EF4-FFF2-40B4-BE49-F238E27FC236}">
-                <a16:creationId xmlns:a16="http://schemas.microsoft.com/office/drawing/2014/main" id="{F71511E9-F499-EFEB-2A71-7BBE0B569D62}"/>
-              </a:ext>
-            </a:extLst>
-          </p:cNvPr>
-          <p:cNvSpPr>
-            <a:spLocks noGrp="1"/>
-          </p:cNvSpPr>
-          <p:nvPr>
-            <p:ph type="body" idx="1"/>
-          </p:nvPr>
-        </p:nvSpPr>
-        <p:spPr>
-          <a:xfrm>
-            <a:off x="533400" y="1066800"/>
-            <a:ext cx="7696200" cy="5324535"/>
-          </a:xfrm>
-        </p:spPr>
-        <p:txBody>
-          <a:bodyPr/>
-          <a:lstStyle/>
-          <a:p>
-            <a:pPr marL="342900" indent="-342900">
-              <a:buFont typeface="Wingdings" panose="05000000000000000000" pitchFamily="2" charset="2"/>
-              <a:buChar char="Ø"/>
-            </a:pPr>
-            <a:r>
-              <a:rPr lang="en-US" sz="2400" b="1" dirty="0">
-                <a:latin typeface="Times New Roman" panose="02020603050405020304" pitchFamily="18" charset="0"/>
-                <a:cs typeface="Times New Roman" panose="02020603050405020304" pitchFamily="18" charset="0"/>
-              </a:rPr>
-              <a:t>Future Work:</a:t>
-            </a:r>
-          </a:p>
-          <a:p>
-            <a:endParaRPr lang="en-US" sz="2000" dirty="0">
-              <a:latin typeface="Times New Roman" panose="02020603050405020304" pitchFamily="18" charset="0"/>
-              <a:cs typeface="Times New Roman" panose="02020603050405020304" pitchFamily="18" charset="0"/>
-            </a:endParaRPr>
-          </a:p>
-          <a:p>
-            <a:pPr marL="342900" indent="-342900">
-              <a:buFont typeface="Wingdings" panose="05000000000000000000" pitchFamily="2" charset="2"/>
-              <a:buChar char="Ø"/>
-            </a:pPr>
-            <a:r>
-              <a:rPr lang="en-US" sz="2000" dirty="0">
-                <a:latin typeface="Times New Roman" panose="02020603050405020304" pitchFamily="18" charset="0"/>
-                <a:cs typeface="Times New Roman" panose="02020603050405020304" pitchFamily="18" charset="0"/>
-              </a:rPr>
-              <a:t>Add features like online appointment booking and patient report tracking.</a:t>
-            </a:r>
-          </a:p>
-          <a:p>
-            <a:pPr marL="342900" indent="-342900">
-              <a:buFont typeface="Wingdings" panose="05000000000000000000" pitchFamily="2" charset="2"/>
-              <a:buChar char="Ø"/>
-            </a:pPr>
-            <a:endParaRPr lang="en-US" sz="2000" dirty="0">
-              <a:latin typeface="Times New Roman" panose="02020603050405020304" pitchFamily="18" charset="0"/>
-              <a:cs typeface="Times New Roman" panose="02020603050405020304" pitchFamily="18" charset="0"/>
-            </a:endParaRPr>
-          </a:p>
-          <a:p>
-            <a:pPr marL="342900" indent="-342900">
-              <a:buFont typeface="Wingdings" panose="05000000000000000000" pitchFamily="2" charset="2"/>
-              <a:buChar char="Ø"/>
-            </a:pPr>
-            <a:r>
-              <a:rPr lang="en-US" sz="2000" dirty="0">
-                <a:latin typeface="Times New Roman" panose="02020603050405020304" pitchFamily="18" charset="0"/>
-                <a:cs typeface="Times New Roman" panose="02020603050405020304" pitchFamily="18" charset="0"/>
-              </a:rPr>
-              <a:t>Connect multiple hospitals to one platform for better reach.</a:t>
-            </a:r>
-          </a:p>
-          <a:p>
-            <a:pPr marL="342900" indent="-342900">
-              <a:buFont typeface="Wingdings" panose="05000000000000000000" pitchFamily="2" charset="2"/>
-              <a:buChar char="Ø"/>
-            </a:pPr>
-            <a:endParaRPr lang="en-US" sz="2000" dirty="0">
-              <a:latin typeface="Times New Roman" panose="02020603050405020304" pitchFamily="18" charset="0"/>
-              <a:cs typeface="Times New Roman" panose="02020603050405020304" pitchFamily="18" charset="0"/>
-            </a:endParaRPr>
-          </a:p>
-          <a:p>
-            <a:pPr marL="342900" indent="-342900">
-              <a:buFont typeface="Wingdings" panose="05000000000000000000" pitchFamily="2" charset="2"/>
-              <a:buChar char="Ø"/>
-            </a:pPr>
-            <a:r>
-              <a:rPr lang="en-US" sz="2000" dirty="0">
-                <a:latin typeface="Times New Roman" panose="02020603050405020304" pitchFamily="18" charset="0"/>
-                <a:cs typeface="Times New Roman" panose="02020603050405020304" pitchFamily="18" charset="0"/>
-              </a:rPr>
-              <a:t>Include AI suggestions for patient wellness and health tips.</a:t>
-            </a:r>
-          </a:p>
-          <a:p>
-            <a:pPr marL="342900" indent="-342900">
-              <a:buFont typeface="Wingdings" panose="05000000000000000000" pitchFamily="2" charset="2"/>
-              <a:buChar char="Ø"/>
-            </a:pPr>
-            <a:endParaRPr lang="en-US" sz="2000" dirty="0">
-              <a:latin typeface="Times New Roman" panose="02020603050405020304" pitchFamily="18" charset="0"/>
-              <a:cs typeface="Times New Roman" panose="02020603050405020304" pitchFamily="18" charset="0"/>
-            </a:endParaRPr>
-          </a:p>
-          <a:p>
-            <a:pPr marL="342900" indent="-342900">
-              <a:buFont typeface="Wingdings" panose="05000000000000000000" pitchFamily="2" charset="2"/>
-              <a:buChar char="Ø"/>
-            </a:pPr>
-            <a:r>
-              <a:rPr lang="en-US" sz="2400" b="1" dirty="0">
-                <a:latin typeface="Times New Roman" panose="02020603050405020304" pitchFamily="18" charset="0"/>
-                <a:cs typeface="Times New Roman" panose="02020603050405020304" pitchFamily="18" charset="0"/>
-              </a:rPr>
-              <a:t>Conclusion</a:t>
-            </a:r>
-            <a:r>
-              <a:rPr lang="en-US" sz="2000" b="1" dirty="0">
-                <a:latin typeface="Times New Roman" panose="02020603050405020304" pitchFamily="18" charset="0"/>
-                <a:cs typeface="Times New Roman" panose="02020603050405020304" pitchFamily="18" charset="0"/>
-              </a:rPr>
-              <a:t>:</a:t>
-            </a:r>
-          </a:p>
-          <a:p>
-            <a:pPr marL="342900" indent="-342900">
-              <a:buFont typeface="Wingdings" panose="05000000000000000000" pitchFamily="2" charset="2"/>
-              <a:buChar char="Ø"/>
-            </a:pPr>
-            <a:endParaRPr lang="en-US" sz="2000" dirty="0">
-              <a:latin typeface="Times New Roman" panose="02020603050405020304" pitchFamily="18" charset="0"/>
-              <a:cs typeface="Times New Roman" panose="02020603050405020304" pitchFamily="18" charset="0"/>
-            </a:endParaRPr>
-          </a:p>
-          <a:p>
-            <a:pPr marL="342900" indent="-342900">
-              <a:buFont typeface="Wingdings" panose="05000000000000000000" pitchFamily="2" charset="2"/>
-              <a:buChar char="Ø"/>
-            </a:pPr>
-            <a:r>
-              <a:rPr lang="en-US" sz="2000" dirty="0">
-                <a:latin typeface="Times New Roman" panose="02020603050405020304" pitchFamily="18" charset="0"/>
-                <a:cs typeface="Times New Roman" panose="02020603050405020304" pitchFamily="18" charset="0"/>
-              </a:rPr>
-              <a:t>The system helps hospitals and patients stay connected in real time.</a:t>
-            </a:r>
-          </a:p>
-          <a:p>
-            <a:pPr marL="342900" indent="-342900">
-              <a:buFont typeface="Wingdings" panose="05000000000000000000" pitchFamily="2" charset="2"/>
-              <a:buChar char="Ø"/>
-            </a:pPr>
-            <a:endParaRPr lang="en-US" sz="2000" dirty="0">
-              <a:latin typeface="Times New Roman" panose="02020603050405020304" pitchFamily="18" charset="0"/>
-              <a:cs typeface="Times New Roman" panose="02020603050405020304" pitchFamily="18" charset="0"/>
-            </a:endParaRPr>
-          </a:p>
-          <a:p>
-            <a:pPr marL="342900" indent="-342900">
-              <a:buFont typeface="Wingdings" panose="05000000000000000000" pitchFamily="2" charset="2"/>
-              <a:buChar char="Ø"/>
-            </a:pPr>
-            <a:r>
-              <a:rPr lang="en-US" sz="2000" dirty="0">
-                <a:latin typeface="Times New Roman" panose="02020603050405020304" pitchFamily="18" charset="0"/>
-                <a:cs typeface="Times New Roman" panose="02020603050405020304" pitchFamily="18" charset="0"/>
-              </a:rPr>
-              <a:t>It reduces crowding, saves time, and ensures better communication.</a:t>
-            </a:r>
-          </a:p>
-          <a:p>
-            <a:pPr marL="342900" indent="-342900">
-              <a:buFont typeface="Wingdings" panose="05000000000000000000" pitchFamily="2" charset="2"/>
-              <a:buChar char="Ø"/>
-            </a:pPr>
-            <a:endParaRPr lang="en-US" sz="2000" dirty="0">
-              <a:latin typeface="Times New Roman" panose="02020603050405020304" pitchFamily="18" charset="0"/>
-              <a:cs typeface="Times New Roman" panose="02020603050405020304" pitchFamily="18" charset="0"/>
-            </a:endParaRPr>
-          </a:p>
-          <a:p>
-            <a:pPr marL="342900" indent="-342900">
-              <a:buFont typeface="Wingdings" panose="05000000000000000000" pitchFamily="2" charset="2"/>
-              <a:buChar char="Ø"/>
-            </a:pPr>
-            <a:r>
-              <a:rPr lang="en-US" sz="2000" dirty="0">
-                <a:latin typeface="Times New Roman" panose="02020603050405020304" pitchFamily="18" charset="0"/>
-                <a:cs typeface="Times New Roman" panose="02020603050405020304" pitchFamily="18" charset="0"/>
-              </a:rPr>
-              <a:t>A small step toward </a:t>
-            </a:r>
-            <a:r>
-              <a:rPr lang="en-US" sz="2000" b="1" dirty="0">
-                <a:latin typeface="Times New Roman" panose="02020603050405020304" pitchFamily="18" charset="0"/>
-                <a:cs typeface="Times New Roman" panose="02020603050405020304" pitchFamily="18" charset="0"/>
-              </a:rPr>
-              <a:t>smart, digital healthcare and wellness.</a:t>
-            </a:r>
-            <a:endParaRPr lang="en-US" sz="2000" dirty="0">
-              <a:latin typeface="Times New Roman" panose="02020603050405020304" pitchFamily="18" charset="0"/>
-              <a:cs typeface="Times New Roman" panose="02020603050405020304" pitchFamily="18" charset="0"/>
-            </a:endParaRPr>
-          </a:p>
-          <a:p>
-            <a:endParaRPr lang="en-IN" dirty="0"/>
-          </a:p>
-        </p:txBody>
-      </p:sp>
-    </p:spTree>
-    <p:extLst>
-      <p:ext uri="{BB962C8B-B14F-4D97-AF65-F5344CB8AC3E}">
-        <p14:creationId xmlns:p14="http://schemas.microsoft.com/office/powerpoint/2010/main" val="447700028"/>
-      </p:ext>
-    </p:extLst>
-  </p:cSld>
-  <p:clrMapOvr>
-    <a:masterClrMapping/>
-  </p:clrMapOvr>
-</p:sld>
-</file>
-
-<file path=ppt/slides/slide18.xml><?xml version="1.0" encoding="utf-8"?>
-<p:sld xmlns:a="http://schemas.openxmlformats.org/drawingml/2006/main" xmlns:r="http://schemas.openxmlformats.org/officeDocument/2006/relationships" xmlns:p="http://schemas.openxmlformats.org/presentationml/2006/main">
-  <p:cSld>
-    <p:spTree>
-      <p:nvGrpSpPr>
-        <p:cNvPr id="1" name=""/>
-        <p:cNvGrpSpPr/>
-        <p:nvPr/>
-      </p:nvGrpSpPr>
-      <p:grpSpPr>
-        <a:xfrm>
-          <a:off x="0" y="0"/>
-          <a:ext cx="0" cy="0"/>
-          <a:chOff x="0" y="0"/>
-          <a:chExt cx="0" cy="0"/>
-        </a:xfrm>
-      </p:grpSpPr>
-      <p:sp>
-        <p:nvSpPr>
-          <p:cNvPr id="2" name="Title 1">
-            <a:extLst>
-              <a:ext uri="{FF2B5EF4-FFF2-40B4-BE49-F238E27FC236}">
-                <a16:creationId xmlns:a16="http://schemas.microsoft.com/office/drawing/2014/main" id="{48A302BF-D718-A035-F4DF-6ABF6CB68F2A}"/>
-              </a:ext>
-            </a:extLst>
-          </p:cNvPr>
-          <p:cNvSpPr>
-            <a:spLocks noGrp="1"/>
-          </p:cNvSpPr>
-          <p:nvPr>
-            <p:ph type="title"/>
-          </p:nvPr>
-        </p:nvSpPr>
-        <p:spPr>
-          <a:xfrm>
-            <a:off x="533400" y="457200"/>
-            <a:ext cx="7114786" cy="553998"/>
-          </a:xfrm>
-        </p:spPr>
-        <p:txBody>
-          <a:bodyPr/>
-          <a:lstStyle/>
-          <a:p>
-            <a:r>
-              <a:rPr lang="en-IN" spc="-10" dirty="0">
-                <a:latin typeface="Times New Roman" panose="02020603050405020304" pitchFamily="18" charset="0"/>
-                <a:cs typeface="Times New Roman" panose="02020603050405020304" pitchFamily="18" charset="0"/>
-              </a:rPr>
-              <a:t>References</a:t>
-            </a:r>
-            <a:endParaRPr lang="en-IN" dirty="0">
-              <a:latin typeface="Times New Roman" panose="02020603050405020304" pitchFamily="18" charset="0"/>
-              <a:cs typeface="Times New Roman" panose="02020603050405020304" pitchFamily="18" charset="0"/>
-            </a:endParaRPr>
-          </a:p>
-        </p:txBody>
-      </p:sp>
-      <p:sp>
-        <p:nvSpPr>
-          <p:cNvPr id="4" name="Rectangle 1">
-            <a:extLst>
-              <a:ext uri="{FF2B5EF4-FFF2-40B4-BE49-F238E27FC236}">
-                <a16:creationId xmlns:a16="http://schemas.microsoft.com/office/drawing/2014/main" id="{01168BD2-4784-4F28-9E14-1131FC6A91A0}"/>
-              </a:ext>
-            </a:extLst>
-          </p:cNvPr>
-          <p:cNvSpPr>
-            <a:spLocks noGrp="1" noChangeArrowheads="1"/>
-          </p:cNvSpPr>
-          <p:nvPr>
-            <p:ph type="body" idx="1"/>
-          </p:nvPr>
-        </p:nvSpPr>
-        <p:spPr bwMode="auto">
-          <a:xfrm>
-            <a:off x="790186" y="1676400"/>
-            <a:ext cx="6858000" cy="3785652"/>
-          </a:xfrm>
-          <a:prstGeom prst="rect">
-            <a:avLst/>
-          </a:prstGeom>
-          <a:noFill/>
-          <a:ln>
-            <a:noFill/>
-          </a:ln>
-          <a:effectLst/>
-          <a:extLst>
-            <a:ext uri="{909E8E84-426E-40DD-AFC4-6F175D3DCCD1}">
-              <a14:hiddenFill xmlns:a14="http://schemas.microsoft.com/office/drawing/2010/main">
-                <a:solidFill>
-                  <a:schemeClr val="accent1"/>
-                </a:solidFill>
-              </a14:hiddenFill>
-            </a:ext>
-            <a:ext uri="{91240B29-F687-4F45-9708-019B960494DF}">
-              <a14:hiddenLine xmlns:a14="http://schemas.microsoft.com/office/drawing/2010/main" w="9525">
-                <a:solidFill>
-                  <a:schemeClr val="tx1"/>
-                </a:solidFill>
-                <a:miter lim="800000"/>
-                <a:headEnd/>
-                <a:tailEnd/>
-              </a14:hiddenLine>
-            </a:ext>
-            <a:ext uri="{AF507438-7753-43E0-B8FC-AC1667EBCBE1}">
-              <a14:hiddenEffects xmlns:a14="http://schemas.microsoft.com/office/drawing/2010/main">
-                <a:effectLst>
-                  <a:outerShdw dist="35921" dir="2700000" algn="ctr" rotWithShape="0">
-                    <a:schemeClr val="bg2"/>
-                  </a:outerShdw>
-                </a:effectLst>
-              </a14:hiddenEffects>
-            </a:ext>
-          </a:extLst>
-        </p:spPr>
-        <p:txBody>
-          <a:bodyPr vert="horz" wrap="square" lIns="91440" tIns="45720" rIns="91440" bIns="45720" numCol="1" anchor="ctr" anchorCtr="0" compatLnSpc="1">
-            <a:prstTxWarp prst="textNoShape">
-              <a:avLst/>
-            </a:prstTxWarp>
-            <a:spAutoFit/>
-          </a:bodyPr>
-          <a:lstStyle/>
-          <a:p>
-            <a:r>
-              <a:rPr lang="en-IN" sz="2000" dirty="0"/>
-              <a:t>Oracle Java Documentation – Exception Handling</a:t>
-            </a:r>
-          </a:p>
-          <a:p>
-            <a:endParaRPr lang="en-IN" sz="2000" dirty="0"/>
-          </a:p>
-          <a:p>
-            <a:r>
-              <a:rPr lang="en-IN" sz="2000" dirty="0"/>
-              <a:t>Java: The Complete Reference – Herbert Schildt</a:t>
-            </a:r>
-          </a:p>
-          <a:p>
-            <a:endParaRPr lang="en-IN" sz="2000" dirty="0"/>
-          </a:p>
-          <a:p>
-            <a:r>
-              <a:rPr lang="en-IN" sz="2000" dirty="0"/>
-              <a:t>Java How to Program – Paul Deitel &amp; Harvey Deitel</a:t>
-            </a:r>
-          </a:p>
-          <a:p>
-            <a:endParaRPr lang="en-IN" sz="2000" dirty="0"/>
-          </a:p>
-          <a:p>
-            <a:r>
-              <a:rPr lang="en-IN" sz="2000" dirty="0"/>
-              <a:t>Exception Handling in Java – </a:t>
-            </a:r>
-            <a:r>
-              <a:rPr lang="en-IN" sz="2000" dirty="0" err="1"/>
-              <a:t>GeeksforGeeks</a:t>
-            </a:r>
-            <a:endParaRPr lang="en-IN" sz="2000" dirty="0"/>
-          </a:p>
-          <a:p>
-            <a:endParaRPr lang="en-IN" sz="2000" dirty="0"/>
-          </a:p>
-          <a:p>
-            <a:r>
-              <a:rPr lang="en-IN" sz="2000" dirty="0"/>
-              <a:t>Java Exception Handling Tutorial – </a:t>
-            </a:r>
-            <a:r>
-              <a:rPr lang="en-IN" sz="2000" dirty="0" err="1"/>
-              <a:t>TutorialsPoint</a:t>
-            </a:r>
-            <a:endParaRPr lang="en-IN" sz="2000" dirty="0"/>
-          </a:p>
-          <a:p>
-            <a:endParaRPr lang="en-IN" sz="2000" dirty="0"/>
-          </a:p>
-          <a:p>
-            <a:r>
-              <a:rPr lang="en-IN" sz="2000" dirty="0"/>
-              <a:t>Unified </a:t>
-            </a:r>
-            <a:r>
-              <a:rPr lang="en-IN" sz="2000" dirty="0" err="1"/>
-              <a:t>Modeling</a:t>
-            </a:r>
-            <a:r>
-              <a:rPr lang="en-IN" sz="2000" dirty="0"/>
-              <a:t> Language (UML) Documentation – Object Management Group</a:t>
-            </a:r>
-          </a:p>
-        </p:txBody>
-      </p:sp>
-    </p:spTree>
-    <p:extLst>
-      <p:ext uri="{BB962C8B-B14F-4D97-AF65-F5344CB8AC3E}">
-        <p14:creationId xmlns:p14="http://schemas.microsoft.com/office/powerpoint/2010/main" val="421944654"/>
-      </p:ext>
-    </p:extLst>
-  </p:cSld>
-  <p:clrMapOvr>
-    <a:masterClrMapping/>
-  </p:clrMapOvr>
-</p:sld>
-</file>
-
-<file path=ppt/slides/slide19.xml><?xml version="1.0" encoding="utf-8"?>
-<p:sld xmlns:a="http://schemas.openxmlformats.org/drawingml/2006/main" xmlns:r="http://schemas.openxmlformats.org/officeDocument/2006/relationships" xmlns:p="http://schemas.openxmlformats.org/presentationml/2006/main">
-  <p:cSld>
-    <p:spTree>
-      <p:nvGrpSpPr>
-        <p:cNvPr id="1" name=""/>
-        <p:cNvGrpSpPr/>
-        <p:nvPr/>
-      </p:nvGrpSpPr>
-      <p:grpSpPr>
-        <a:xfrm>
-          <a:off x="0" y="0"/>
-          <a:ext cx="0" cy="0"/>
-          <a:chOff x="0" y="0"/>
-          <a:chExt cx="0" cy="0"/>
-        </a:xfrm>
-      </p:grpSpPr>
-      <p:sp>
-        <p:nvSpPr>
-          <p:cNvPr id="2" name="Title 1">
-            <a:extLst>
-              <a:ext uri="{FF2B5EF4-FFF2-40B4-BE49-F238E27FC236}">
-                <a16:creationId xmlns:a16="http://schemas.microsoft.com/office/drawing/2014/main" id="{FB4CD4F7-319B-4D54-8D00-225154E24A01}"/>
-              </a:ext>
-            </a:extLst>
-          </p:cNvPr>
-          <p:cNvSpPr>
-            <a:spLocks noGrp="1"/>
-          </p:cNvSpPr>
-          <p:nvPr>
-            <p:ph type="title"/>
-          </p:nvPr>
-        </p:nvSpPr>
-        <p:spPr>
-          <a:xfrm>
-            <a:off x="3124200" y="2895600"/>
-            <a:ext cx="2971800" cy="677108"/>
-          </a:xfrm>
-        </p:spPr>
-        <p:txBody>
-          <a:bodyPr/>
-          <a:lstStyle/>
-          <a:p>
-            <a:r>
-              <a:rPr lang="en-US" sz="4400" dirty="0">
-                <a:latin typeface="Times New Roman" panose="02020603050405020304" pitchFamily="18" charset="0"/>
-                <a:cs typeface="Times New Roman" panose="02020603050405020304" pitchFamily="18" charset="0"/>
-              </a:rPr>
-              <a:t>Thank you</a:t>
-            </a:r>
-          </a:p>
-        </p:txBody>
-      </p:sp>
-    </p:spTree>
-    <p:extLst>
-      <p:ext uri="{BB962C8B-B14F-4D97-AF65-F5344CB8AC3E}">
-        <p14:creationId xmlns:p14="http://schemas.microsoft.com/office/powerpoint/2010/main" val="420104628"/>
       </p:ext>
     </p:extLst>
   </p:cSld>
@@ -5854,6 +5227,609 @@
 </p:sld>
 </file>
 
+<file path=ppt/slides/slide20.xml><?xml version="1.0" encoding="utf-8"?>
+<p:sld xmlns:a="http://schemas.openxmlformats.org/drawingml/2006/main" xmlns:r="http://schemas.openxmlformats.org/officeDocument/2006/relationships" xmlns:p="http://schemas.openxmlformats.org/presentationml/2006/main">
+  <p:cSld>
+    <p:spTree>
+      <p:nvGrpSpPr>
+        <p:cNvPr id="1" name=""/>
+        <p:cNvGrpSpPr/>
+        <p:nvPr/>
+      </p:nvGrpSpPr>
+      <p:grpSpPr>
+        <a:xfrm>
+          <a:off x="0" y="0"/>
+          <a:ext cx="0" cy="0"/>
+          <a:chOff x="0" y="0"/>
+          <a:chExt cx="0" cy="0"/>
+        </a:xfrm>
+      </p:grpSpPr>
+      <p:sp>
+        <p:nvSpPr>
+          <p:cNvPr id="2" name="Title 1">
+            <a:extLst>
+              <a:ext uri="{FF2B5EF4-FFF2-40B4-BE49-F238E27FC236}">
+                <a16:creationId xmlns:a16="http://schemas.microsoft.com/office/drawing/2014/main" id="{DC02E607-25FE-1C88-DE6C-2E6BE4BA3961}"/>
+              </a:ext>
+            </a:extLst>
+          </p:cNvPr>
+          <p:cNvSpPr>
+            <a:spLocks noGrp="1"/>
+          </p:cNvSpPr>
+          <p:nvPr>
+            <p:ph type="title"/>
+          </p:nvPr>
+        </p:nvSpPr>
+        <p:spPr>
+          <a:xfrm>
+            <a:off x="376625" y="196024"/>
+            <a:ext cx="7114786" cy="553998"/>
+          </a:xfrm>
+        </p:spPr>
+        <p:txBody>
+          <a:bodyPr/>
+          <a:lstStyle/>
+          <a:p>
+            <a:r>
+              <a:rPr lang="en-IN" dirty="0">
+                <a:latin typeface="Times New Roman" panose="02020603050405020304" pitchFamily="18" charset="0"/>
+                <a:cs typeface="Times New Roman" panose="02020603050405020304" pitchFamily="18" charset="0"/>
+              </a:rPr>
+              <a:t>Future</a:t>
+            </a:r>
+            <a:r>
+              <a:rPr lang="en-IN" spc="-130" dirty="0">
+                <a:latin typeface="Times New Roman" panose="02020603050405020304" pitchFamily="18" charset="0"/>
+                <a:cs typeface="Times New Roman" panose="02020603050405020304" pitchFamily="18" charset="0"/>
+              </a:rPr>
+              <a:t> </a:t>
+            </a:r>
+            <a:r>
+              <a:rPr lang="en-IN" dirty="0">
+                <a:latin typeface="Times New Roman" panose="02020603050405020304" pitchFamily="18" charset="0"/>
+                <a:cs typeface="Times New Roman" panose="02020603050405020304" pitchFamily="18" charset="0"/>
+              </a:rPr>
+              <a:t>Work</a:t>
+            </a:r>
+            <a:r>
+              <a:rPr lang="en-IN" spc="-125" dirty="0">
+                <a:latin typeface="Times New Roman" panose="02020603050405020304" pitchFamily="18" charset="0"/>
+                <a:cs typeface="Times New Roman" panose="02020603050405020304" pitchFamily="18" charset="0"/>
+              </a:rPr>
+              <a:t> </a:t>
+            </a:r>
+            <a:r>
+              <a:rPr lang="en-IN" dirty="0">
+                <a:latin typeface="Times New Roman" panose="02020603050405020304" pitchFamily="18" charset="0"/>
+                <a:cs typeface="Times New Roman" panose="02020603050405020304" pitchFamily="18" charset="0"/>
+              </a:rPr>
+              <a:t>&amp;</a:t>
+            </a:r>
+            <a:r>
+              <a:rPr lang="en-IN" spc="-125" dirty="0">
+                <a:latin typeface="Times New Roman" panose="02020603050405020304" pitchFamily="18" charset="0"/>
+                <a:cs typeface="Times New Roman" panose="02020603050405020304" pitchFamily="18" charset="0"/>
+              </a:rPr>
+              <a:t> </a:t>
+            </a:r>
+            <a:r>
+              <a:rPr lang="en-IN" spc="-10" dirty="0">
+                <a:latin typeface="Times New Roman" panose="02020603050405020304" pitchFamily="18" charset="0"/>
+                <a:cs typeface="Times New Roman" panose="02020603050405020304" pitchFamily="18" charset="0"/>
+              </a:rPr>
+              <a:t>Conclusion</a:t>
+            </a:r>
+            <a:endParaRPr lang="en-IN" dirty="0">
+              <a:latin typeface="Times New Roman" panose="02020603050405020304" pitchFamily="18" charset="0"/>
+              <a:cs typeface="Times New Roman" panose="02020603050405020304" pitchFamily="18" charset="0"/>
+            </a:endParaRPr>
+          </a:p>
+        </p:txBody>
+      </p:sp>
+      <p:sp>
+        <p:nvSpPr>
+          <p:cNvPr id="3" name="Text Placeholder 2">
+            <a:extLst>
+              <a:ext uri="{FF2B5EF4-FFF2-40B4-BE49-F238E27FC236}">
+                <a16:creationId xmlns:a16="http://schemas.microsoft.com/office/drawing/2014/main" id="{F71511E9-F499-EFEB-2A71-7BBE0B569D62}"/>
+              </a:ext>
+            </a:extLst>
+          </p:cNvPr>
+          <p:cNvSpPr>
+            <a:spLocks noGrp="1"/>
+          </p:cNvSpPr>
+          <p:nvPr>
+            <p:ph type="body" idx="1"/>
+          </p:nvPr>
+        </p:nvSpPr>
+        <p:spPr>
+          <a:xfrm>
+            <a:off x="533400" y="1066800"/>
+            <a:ext cx="7696200" cy="5324535"/>
+          </a:xfrm>
+        </p:spPr>
+        <p:txBody>
+          <a:bodyPr/>
+          <a:lstStyle/>
+          <a:p>
+            <a:pPr marL="342900" indent="-342900">
+              <a:buFont typeface="Wingdings" panose="05000000000000000000" pitchFamily="2" charset="2"/>
+              <a:buChar char="Ø"/>
+            </a:pPr>
+            <a:r>
+              <a:rPr lang="en-US" sz="2400" b="1" dirty="0">
+                <a:latin typeface="Times New Roman" panose="02020603050405020304" pitchFamily="18" charset="0"/>
+                <a:cs typeface="Times New Roman" panose="02020603050405020304" pitchFamily="18" charset="0"/>
+              </a:rPr>
+              <a:t>Future Work:</a:t>
+            </a:r>
+          </a:p>
+          <a:p>
+            <a:endParaRPr lang="en-US" sz="2000" dirty="0">
+              <a:latin typeface="Times New Roman" panose="02020603050405020304" pitchFamily="18" charset="0"/>
+              <a:cs typeface="Times New Roman" panose="02020603050405020304" pitchFamily="18" charset="0"/>
+            </a:endParaRPr>
+          </a:p>
+          <a:p>
+            <a:pPr marL="342900" indent="-342900">
+              <a:buFont typeface="Wingdings" panose="05000000000000000000" pitchFamily="2" charset="2"/>
+              <a:buChar char="Ø"/>
+            </a:pPr>
+            <a:r>
+              <a:rPr lang="en-US" sz="2000" dirty="0">
+                <a:latin typeface="Times New Roman" panose="02020603050405020304" pitchFamily="18" charset="0"/>
+                <a:cs typeface="Times New Roman" panose="02020603050405020304" pitchFamily="18" charset="0"/>
+              </a:rPr>
+              <a:t>Add features like online appointment booking and patient report tracking.</a:t>
+            </a:r>
+          </a:p>
+          <a:p>
+            <a:pPr marL="342900" indent="-342900">
+              <a:buFont typeface="Wingdings" panose="05000000000000000000" pitchFamily="2" charset="2"/>
+              <a:buChar char="Ø"/>
+            </a:pPr>
+            <a:endParaRPr lang="en-US" sz="2000" dirty="0">
+              <a:latin typeface="Times New Roman" panose="02020603050405020304" pitchFamily="18" charset="0"/>
+              <a:cs typeface="Times New Roman" panose="02020603050405020304" pitchFamily="18" charset="0"/>
+            </a:endParaRPr>
+          </a:p>
+          <a:p>
+            <a:pPr marL="342900" indent="-342900">
+              <a:buFont typeface="Wingdings" panose="05000000000000000000" pitchFamily="2" charset="2"/>
+              <a:buChar char="Ø"/>
+            </a:pPr>
+            <a:r>
+              <a:rPr lang="en-US" sz="2000" dirty="0">
+                <a:latin typeface="Times New Roman" panose="02020603050405020304" pitchFamily="18" charset="0"/>
+                <a:cs typeface="Times New Roman" panose="02020603050405020304" pitchFamily="18" charset="0"/>
+              </a:rPr>
+              <a:t>Connect multiple hospitals to one platform for better reach.</a:t>
+            </a:r>
+          </a:p>
+          <a:p>
+            <a:pPr marL="342900" indent="-342900">
+              <a:buFont typeface="Wingdings" panose="05000000000000000000" pitchFamily="2" charset="2"/>
+              <a:buChar char="Ø"/>
+            </a:pPr>
+            <a:endParaRPr lang="en-US" sz="2000" dirty="0">
+              <a:latin typeface="Times New Roman" panose="02020603050405020304" pitchFamily="18" charset="0"/>
+              <a:cs typeface="Times New Roman" panose="02020603050405020304" pitchFamily="18" charset="0"/>
+            </a:endParaRPr>
+          </a:p>
+          <a:p>
+            <a:pPr marL="342900" indent="-342900">
+              <a:buFont typeface="Wingdings" panose="05000000000000000000" pitchFamily="2" charset="2"/>
+              <a:buChar char="Ø"/>
+            </a:pPr>
+            <a:r>
+              <a:rPr lang="en-US" sz="2000" dirty="0">
+                <a:latin typeface="Times New Roman" panose="02020603050405020304" pitchFamily="18" charset="0"/>
+                <a:cs typeface="Times New Roman" panose="02020603050405020304" pitchFamily="18" charset="0"/>
+              </a:rPr>
+              <a:t>Include AI suggestions for patient wellness and health tips.</a:t>
+            </a:r>
+          </a:p>
+          <a:p>
+            <a:pPr marL="342900" indent="-342900">
+              <a:buFont typeface="Wingdings" panose="05000000000000000000" pitchFamily="2" charset="2"/>
+              <a:buChar char="Ø"/>
+            </a:pPr>
+            <a:endParaRPr lang="en-US" sz="2000" dirty="0">
+              <a:latin typeface="Times New Roman" panose="02020603050405020304" pitchFamily="18" charset="0"/>
+              <a:cs typeface="Times New Roman" panose="02020603050405020304" pitchFamily="18" charset="0"/>
+            </a:endParaRPr>
+          </a:p>
+          <a:p>
+            <a:pPr marL="342900" indent="-342900">
+              <a:buFont typeface="Wingdings" panose="05000000000000000000" pitchFamily="2" charset="2"/>
+              <a:buChar char="Ø"/>
+            </a:pPr>
+            <a:r>
+              <a:rPr lang="en-US" sz="2400" b="1" dirty="0">
+                <a:latin typeface="Times New Roman" panose="02020603050405020304" pitchFamily="18" charset="0"/>
+                <a:cs typeface="Times New Roman" panose="02020603050405020304" pitchFamily="18" charset="0"/>
+              </a:rPr>
+              <a:t>Conclusion</a:t>
+            </a:r>
+            <a:r>
+              <a:rPr lang="en-US" sz="2000" b="1" dirty="0">
+                <a:latin typeface="Times New Roman" panose="02020603050405020304" pitchFamily="18" charset="0"/>
+                <a:cs typeface="Times New Roman" panose="02020603050405020304" pitchFamily="18" charset="0"/>
+              </a:rPr>
+              <a:t>:</a:t>
+            </a:r>
+          </a:p>
+          <a:p>
+            <a:pPr marL="342900" indent="-342900">
+              <a:buFont typeface="Wingdings" panose="05000000000000000000" pitchFamily="2" charset="2"/>
+              <a:buChar char="Ø"/>
+            </a:pPr>
+            <a:endParaRPr lang="en-US" sz="2000" dirty="0">
+              <a:latin typeface="Times New Roman" panose="02020603050405020304" pitchFamily="18" charset="0"/>
+              <a:cs typeface="Times New Roman" panose="02020603050405020304" pitchFamily="18" charset="0"/>
+            </a:endParaRPr>
+          </a:p>
+          <a:p>
+            <a:pPr marL="342900" indent="-342900">
+              <a:buFont typeface="Wingdings" panose="05000000000000000000" pitchFamily="2" charset="2"/>
+              <a:buChar char="Ø"/>
+            </a:pPr>
+            <a:r>
+              <a:rPr lang="en-US" sz="2000" dirty="0">
+                <a:latin typeface="Times New Roman" panose="02020603050405020304" pitchFamily="18" charset="0"/>
+                <a:cs typeface="Times New Roman" panose="02020603050405020304" pitchFamily="18" charset="0"/>
+              </a:rPr>
+              <a:t>The system helps hospitals and patients stay connected in real time.</a:t>
+            </a:r>
+          </a:p>
+          <a:p>
+            <a:pPr marL="342900" indent="-342900">
+              <a:buFont typeface="Wingdings" panose="05000000000000000000" pitchFamily="2" charset="2"/>
+              <a:buChar char="Ø"/>
+            </a:pPr>
+            <a:endParaRPr lang="en-US" sz="2000" dirty="0">
+              <a:latin typeface="Times New Roman" panose="02020603050405020304" pitchFamily="18" charset="0"/>
+              <a:cs typeface="Times New Roman" panose="02020603050405020304" pitchFamily="18" charset="0"/>
+            </a:endParaRPr>
+          </a:p>
+          <a:p>
+            <a:pPr marL="342900" indent="-342900">
+              <a:buFont typeface="Wingdings" panose="05000000000000000000" pitchFamily="2" charset="2"/>
+              <a:buChar char="Ø"/>
+            </a:pPr>
+            <a:r>
+              <a:rPr lang="en-US" sz="2000" dirty="0">
+                <a:latin typeface="Times New Roman" panose="02020603050405020304" pitchFamily="18" charset="0"/>
+                <a:cs typeface="Times New Roman" panose="02020603050405020304" pitchFamily="18" charset="0"/>
+              </a:rPr>
+              <a:t>It reduces crowding, saves time, and ensures better communication.</a:t>
+            </a:r>
+          </a:p>
+          <a:p>
+            <a:pPr marL="342900" indent="-342900">
+              <a:buFont typeface="Wingdings" panose="05000000000000000000" pitchFamily="2" charset="2"/>
+              <a:buChar char="Ø"/>
+            </a:pPr>
+            <a:endParaRPr lang="en-US" sz="2000" dirty="0">
+              <a:latin typeface="Times New Roman" panose="02020603050405020304" pitchFamily="18" charset="0"/>
+              <a:cs typeface="Times New Roman" panose="02020603050405020304" pitchFamily="18" charset="0"/>
+            </a:endParaRPr>
+          </a:p>
+          <a:p>
+            <a:pPr marL="342900" indent="-342900">
+              <a:buFont typeface="Wingdings" panose="05000000000000000000" pitchFamily="2" charset="2"/>
+              <a:buChar char="Ø"/>
+            </a:pPr>
+            <a:r>
+              <a:rPr lang="en-US" sz="2000" dirty="0">
+                <a:latin typeface="Times New Roman" panose="02020603050405020304" pitchFamily="18" charset="0"/>
+                <a:cs typeface="Times New Roman" panose="02020603050405020304" pitchFamily="18" charset="0"/>
+              </a:rPr>
+              <a:t>A small step toward </a:t>
+            </a:r>
+            <a:r>
+              <a:rPr lang="en-US" sz="2000" b="1" dirty="0">
+                <a:latin typeface="Times New Roman" panose="02020603050405020304" pitchFamily="18" charset="0"/>
+                <a:cs typeface="Times New Roman" panose="02020603050405020304" pitchFamily="18" charset="0"/>
+              </a:rPr>
+              <a:t>smart, digital healthcare and wellness.</a:t>
+            </a:r>
+            <a:endParaRPr lang="en-US" sz="2000" dirty="0">
+              <a:latin typeface="Times New Roman" panose="02020603050405020304" pitchFamily="18" charset="0"/>
+              <a:cs typeface="Times New Roman" panose="02020603050405020304" pitchFamily="18" charset="0"/>
+            </a:endParaRPr>
+          </a:p>
+          <a:p>
+            <a:endParaRPr lang="en-IN" dirty="0"/>
+          </a:p>
+        </p:txBody>
+      </p:sp>
+    </p:spTree>
+    <p:extLst>
+      <p:ext uri="{BB962C8B-B14F-4D97-AF65-F5344CB8AC3E}">
+        <p14:creationId xmlns:p14="http://schemas.microsoft.com/office/powerpoint/2010/main" val="447700028"/>
+      </p:ext>
+    </p:extLst>
+  </p:cSld>
+  <p:clrMapOvr>
+    <a:masterClrMapping/>
+  </p:clrMapOvr>
+</p:sld>
+</file>
+
+<file path=ppt/slides/slide21.xml><?xml version="1.0" encoding="utf-8"?>
+<p:sld xmlns:a="http://schemas.openxmlformats.org/drawingml/2006/main" xmlns:r="http://schemas.openxmlformats.org/officeDocument/2006/relationships" xmlns:p="http://schemas.openxmlformats.org/presentationml/2006/main">
+  <p:cSld>
+    <p:spTree>
+      <p:nvGrpSpPr>
+        <p:cNvPr id="1" name=""/>
+        <p:cNvGrpSpPr/>
+        <p:nvPr/>
+      </p:nvGrpSpPr>
+      <p:grpSpPr>
+        <a:xfrm>
+          <a:off x="0" y="0"/>
+          <a:ext cx="0" cy="0"/>
+          <a:chOff x="0" y="0"/>
+          <a:chExt cx="0" cy="0"/>
+        </a:xfrm>
+      </p:grpSpPr>
+      <p:sp>
+        <p:nvSpPr>
+          <p:cNvPr id="2" name="Title 1">
+            <a:extLst>
+              <a:ext uri="{FF2B5EF4-FFF2-40B4-BE49-F238E27FC236}">
+                <a16:creationId xmlns:a16="http://schemas.microsoft.com/office/drawing/2014/main" id="{48A302BF-D718-A035-F4DF-6ABF6CB68F2A}"/>
+              </a:ext>
+            </a:extLst>
+          </p:cNvPr>
+          <p:cNvSpPr>
+            <a:spLocks noGrp="1"/>
+          </p:cNvSpPr>
+          <p:nvPr>
+            <p:ph type="title"/>
+          </p:nvPr>
+        </p:nvSpPr>
+        <p:spPr>
+          <a:xfrm>
+            <a:off x="533400" y="457200"/>
+            <a:ext cx="7114786" cy="553998"/>
+          </a:xfrm>
+        </p:spPr>
+        <p:txBody>
+          <a:bodyPr/>
+          <a:lstStyle/>
+          <a:p>
+            <a:r>
+              <a:rPr lang="en-IN" spc="-10" dirty="0">
+                <a:latin typeface="Times New Roman" panose="02020603050405020304" pitchFamily="18" charset="0"/>
+                <a:cs typeface="Times New Roman" panose="02020603050405020304" pitchFamily="18" charset="0"/>
+              </a:rPr>
+              <a:t>References</a:t>
+            </a:r>
+            <a:endParaRPr lang="en-IN" dirty="0">
+              <a:latin typeface="Times New Roman" panose="02020603050405020304" pitchFamily="18" charset="0"/>
+              <a:cs typeface="Times New Roman" panose="02020603050405020304" pitchFamily="18" charset="0"/>
+            </a:endParaRPr>
+          </a:p>
+        </p:txBody>
+      </p:sp>
+      <p:sp>
+        <p:nvSpPr>
+          <p:cNvPr id="4" name="Rectangle 1">
+            <a:extLst>
+              <a:ext uri="{FF2B5EF4-FFF2-40B4-BE49-F238E27FC236}">
+                <a16:creationId xmlns:a16="http://schemas.microsoft.com/office/drawing/2014/main" id="{01168BD2-4784-4F28-9E14-1131FC6A91A0}"/>
+              </a:ext>
+            </a:extLst>
+          </p:cNvPr>
+          <p:cNvSpPr>
+            <a:spLocks noGrp="1" noChangeArrowheads="1"/>
+          </p:cNvSpPr>
+          <p:nvPr>
+            <p:ph type="body" idx="1"/>
+          </p:nvPr>
+        </p:nvSpPr>
+        <p:spPr bwMode="auto">
+          <a:xfrm>
+            <a:off x="790186" y="1676400"/>
+            <a:ext cx="6858000" cy="3785652"/>
+          </a:xfrm>
+          <a:prstGeom prst="rect">
+            <a:avLst/>
+          </a:prstGeom>
+          <a:noFill/>
+          <a:ln>
+            <a:noFill/>
+          </a:ln>
+          <a:effectLst/>
+          <a:extLst>
+            <a:ext uri="{909E8E84-426E-40DD-AFC4-6F175D3DCCD1}">
+              <a14:hiddenFill xmlns:a14="http://schemas.microsoft.com/office/drawing/2010/main">
+                <a:solidFill>
+                  <a:schemeClr val="accent1"/>
+                </a:solidFill>
+              </a14:hiddenFill>
+            </a:ext>
+            <a:ext uri="{91240B29-F687-4F45-9708-019B960494DF}">
+              <a14:hiddenLine xmlns:a14="http://schemas.microsoft.com/office/drawing/2010/main" w="9525">
+                <a:solidFill>
+                  <a:schemeClr val="tx1"/>
+                </a:solidFill>
+                <a:miter lim="800000"/>
+                <a:headEnd/>
+                <a:tailEnd/>
+              </a14:hiddenLine>
+            </a:ext>
+            <a:ext uri="{AF507438-7753-43E0-B8FC-AC1667EBCBE1}">
+              <a14:hiddenEffects xmlns:a14="http://schemas.microsoft.com/office/drawing/2010/main">
+                <a:effectLst>
+                  <a:outerShdw dist="35921" dir="2700000" algn="ctr" rotWithShape="0">
+                    <a:schemeClr val="bg2"/>
+                  </a:outerShdw>
+                </a:effectLst>
+              </a14:hiddenEffects>
+            </a:ext>
+          </a:extLst>
+        </p:spPr>
+        <p:txBody>
+          <a:bodyPr vert="horz" wrap="square" lIns="91440" tIns="45720" rIns="91440" bIns="45720" numCol="1" anchor="ctr" anchorCtr="0" compatLnSpc="1">
+            <a:prstTxWarp prst="textNoShape">
+              <a:avLst/>
+            </a:prstTxWarp>
+            <a:spAutoFit/>
+          </a:bodyPr>
+          <a:lstStyle/>
+          <a:p>
+            <a:r>
+              <a:rPr lang="en-IN" sz="2000" dirty="0"/>
+              <a:t>Oracle Java Documentation – Exception Handling</a:t>
+            </a:r>
+          </a:p>
+          <a:p>
+            <a:endParaRPr lang="en-IN" sz="2000" dirty="0"/>
+          </a:p>
+          <a:p>
+            <a:r>
+              <a:rPr lang="en-IN" sz="2000" dirty="0"/>
+              <a:t>Java: The Complete Reference – Herbert Schildt</a:t>
+            </a:r>
+          </a:p>
+          <a:p>
+            <a:endParaRPr lang="en-IN" sz="2000" dirty="0"/>
+          </a:p>
+          <a:p>
+            <a:r>
+              <a:rPr lang="en-IN" sz="2000" dirty="0"/>
+              <a:t>Java How to Program – Paul Deitel &amp; Harvey Deitel</a:t>
+            </a:r>
+          </a:p>
+          <a:p>
+            <a:endParaRPr lang="en-IN" sz="2000" dirty="0"/>
+          </a:p>
+          <a:p>
+            <a:r>
+              <a:rPr lang="en-IN" sz="2000" dirty="0"/>
+              <a:t>Exception Handling in Java – </a:t>
+            </a:r>
+            <a:r>
+              <a:rPr lang="en-IN" sz="2000" dirty="0" err="1"/>
+              <a:t>GeeksforGeeks</a:t>
+            </a:r>
+            <a:endParaRPr lang="en-IN" sz="2000" dirty="0"/>
+          </a:p>
+          <a:p>
+            <a:endParaRPr lang="en-IN" sz="2000" dirty="0"/>
+          </a:p>
+          <a:p>
+            <a:r>
+              <a:rPr lang="en-IN" sz="2000" dirty="0"/>
+              <a:t>Java Exception Handling Tutorial – </a:t>
+            </a:r>
+            <a:r>
+              <a:rPr lang="en-IN" sz="2000" dirty="0" err="1"/>
+              <a:t>TutorialsPoint</a:t>
+            </a:r>
+            <a:endParaRPr lang="en-IN" sz="2000" dirty="0"/>
+          </a:p>
+          <a:p>
+            <a:endParaRPr lang="en-IN" sz="2000" dirty="0"/>
+          </a:p>
+          <a:p>
+            <a:r>
+              <a:rPr lang="en-IN" sz="2000" dirty="0"/>
+              <a:t>Unified </a:t>
+            </a:r>
+            <a:r>
+              <a:rPr lang="en-IN" sz="2000" dirty="0" err="1"/>
+              <a:t>Modeling</a:t>
+            </a:r>
+            <a:r>
+              <a:rPr lang="en-IN" sz="2000" dirty="0"/>
+              <a:t> Language (UML) Documentation – Object Management Group</a:t>
+            </a:r>
+          </a:p>
+        </p:txBody>
+      </p:sp>
+    </p:spTree>
+    <p:extLst>
+      <p:ext uri="{BB962C8B-B14F-4D97-AF65-F5344CB8AC3E}">
+        <p14:creationId xmlns:p14="http://schemas.microsoft.com/office/powerpoint/2010/main" val="421944654"/>
+      </p:ext>
+    </p:extLst>
+  </p:cSld>
+  <p:clrMapOvr>
+    <a:masterClrMapping/>
+  </p:clrMapOvr>
+</p:sld>
+</file>
+
+<file path=ppt/slides/slide22.xml><?xml version="1.0" encoding="utf-8"?>
+<p:sld xmlns:a="http://schemas.openxmlformats.org/drawingml/2006/main" xmlns:r="http://schemas.openxmlformats.org/officeDocument/2006/relationships" xmlns:p="http://schemas.openxmlformats.org/presentationml/2006/main">
+  <p:cSld>
+    <p:spTree>
+      <p:nvGrpSpPr>
+        <p:cNvPr id="1" name=""/>
+        <p:cNvGrpSpPr/>
+        <p:nvPr/>
+      </p:nvGrpSpPr>
+      <p:grpSpPr>
+        <a:xfrm>
+          <a:off x="0" y="0"/>
+          <a:ext cx="0" cy="0"/>
+          <a:chOff x="0" y="0"/>
+          <a:chExt cx="0" cy="0"/>
+        </a:xfrm>
+      </p:grpSpPr>
+      <p:sp>
+        <p:nvSpPr>
+          <p:cNvPr id="2" name="Title 1">
+            <a:extLst>
+              <a:ext uri="{FF2B5EF4-FFF2-40B4-BE49-F238E27FC236}">
+                <a16:creationId xmlns:a16="http://schemas.microsoft.com/office/drawing/2014/main" id="{FB4CD4F7-319B-4D54-8D00-225154E24A01}"/>
+              </a:ext>
+            </a:extLst>
+          </p:cNvPr>
+          <p:cNvSpPr>
+            <a:spLocks noGrp="1"/>
+          </p:cNvSpPr>
+          <p:nvPr>
+            <p:ph type="title"/>
+          </p:nvPr>
+        </p:nvSpPr>
+        <p:spPr>
+          <a:xfrm>
+            <a:off x="3124200" y="2895600"/>
+            <a:ext cx="2971800" cy="677108"/>
+          </a:xfrm>
+        </p:spPr>
+        <p:txBody>
+          <a:bodyPr/>
+          <a:lstStyle/>
+          <a:p>
+            <a:r>
+              <a:rPr lang="en-US" sz="4400" dirty="0">
+                <a:latin typeface="Times New Roman" panose="02020603050405020304" pitchFamily="18" charset="0"/>
+                <a:cs typeface="Times New Roman" panose="02020603050405020304" pitchFamily="18" charset="0"/>
+              </a:rPr>
+              <a:t>Thank you</a:t>
+            </a:r>
+          </a:p>
+        </p:txBody>
+      </p:sp>
+    </p:spTree>
+    <p:extLst>
+      <p:ext uri="{BB962C8B-B14F-4D97-AF65-F5344CB8AC3E}">
+        <p14:creationId xmlns:p14="http://schemas.microsoft.com/office/powerpoint/2010/main" val="420104628"/>
+      </p:ext>
+    </p:extLst>
+  </p:cSld>
+  <p:clrMapOvr>
+    <a:masterClrMapping/>
+  </p:clrMapOvr>
+</p:sld>
+</file>
+
 <file path=ppt/slides/slide3.xml><?xml version="1.0" encoding="utf-8"?>
 <p:sld xmlns:a="http://schemas.openxmlformats.org/drawingml/2006/main" xmlns:r="http://schemas.openxmlformats.org/officeDocument/2006/relationships" xmlns:p="http://schemas.openxmlformats.org/presentationml/2006/main">
   <p:cSld>
@@ -7814,104 +7790,41 @@
           <a:chExt cx="0" cy="0"/>
         </a:xfrm>
       </p:grpSpPr>
-      <p:sp>
-        <p:nvSpPr>
-          <p:cNvPr id="2" name="Title 1">
+      <p:pic>
+        <p:nvPicPr>
+          <p:cNvPr id="3" name="Picture 2">
             <a:extLst>
               <a:ext uri="{FF2B5EF4-FFF2-40B4-BE49-F238E27FC236}">
-                <a16:creationId xmlns:a16="http://schemas.microsoft.com/office/drawing/2014/main" id="{13FAB5F3-5324-4D9C-A945-F8B1AEF16BF3}"/>
-              </a:ext>
-            </a:extLst>
-          </p:cNvPr>
-          <p:cNvSpPr>
-            <a:spLocks noGrp="1"/>
-          </p:cNvSpPr>
-          <p:nvPr>
-            <p:ph type="title"/>
-          </p:nvPr>
-        </p:nvSpPr>
-        <p:spPr>
-          <a:xfrm>
-            <a:off x="533400" y="838200"/>
-            <a:ext cx="7114786" cy="1070927"/>
-          </a:xfrm>
-        </p:spPr>
-        <p:txBody>
-          <a:bodyPr/>
-          <a:lstStyle/>
-          <a:p>
-            <a:r>
-              <a:rPr lang="en-US" dirty="0">
-                <a:latin typeface="Times New Roman" panose="02020603050405020304" pitchFamily="18" charset="0"/>
-                <a:cs typeface="Times New Roman" panose="02020603050405020304" pitchFamily="18" charset="0"/>
-              </a:rPr>
-              <a:t>Prototype </a:t>
-            </a:r>
-          </a:p>
-        </p:txBody>
-      </p:sp>
-      <p:pic>
-        <p:nvPicPr>
-          <p:cNvPr id="14" name="Content Placeholder 13">
-            <a:extLst>
-              <a:ext uri="{FF2B5EF4-FFF2-40B4-BE49-F238E27FC236}">
-                <a16:creationId xmlns:a16="http://schemas.microsoft.com/office/drawing/2014/main" id="{100AE01E-3D42-4DD2-A069-5ACFA5FE9A41}"/>
+                <a16:creationId xmlns:a16="http://schemas.microsoft.com/office/drawing/2014/main" id="{04120633-87AE-BBF0-2090-CD9CFA06CC5F}"/>
               </a:ext>
             </a:extLst>
           </p:cNvPr>
           <p:cNvPicPr>
-            <a:picLocks noGrp="1" noChangeAspect="1"/>
+            <a:picLocks noChangeAspect="1"/>
           </p:cNvPicPr>
-          <p:nvPr>
-            <p:ph sz="half" idx="2"/>
-          </p:nvPr>
+          <p:nvPr/>
         </p:nvPicPr>
         <p:blipFill>
           <a:blip r:embed="rId2"/>
+          <a:srcRect t="11888" b="5594"/>
           <a:stretch>
             <a:fillRect/>
           </a:stretch>
         </p:blipFill>
         <p:spPr>
           <a:xfrm>
-            <a:off x="457200" y="2152638"/>
-            <a:ext cx="3978275" cy="3376636"/>
+            <a:off x="0" y="1219200"/>
+            <a:ext cx="9144000" cy="4495800"/>
           </a:xfrm>
-        </p:spPr>
-      </p:pic>
-      <p:pic>
-        <p:nvPicPr>
-          <p:cNvPr id="12" name="Content Placeholder 11">
-            <a:extLst>
-              <a:ext uri="{FF2B5EF4-FFF2-40B4-BE49-F238E27FC236}">
-                <a16:creationId xmlns:a16="http://schemas.microsoft.com/office/drawing/2014/main" id="{E2B0BD0D-EB5C-4962-86D1-26C3D1AB1DFA}"/>
-              </a:ext>
-            </a:extLst>
-          </p:cNvPr>
-          <p:cNvPicPr>
-            <a:picLocks noGrp="1" noChangeAspect="1"/>
-          </p:cNvPicPr>
-          <p:nvPr>
-            <p:ph sz="half" idx="3"/>
-          </p:nvPr>
-        </p:nvPicPr>
-        <p:blipFill>
-          <a:blip r:embed="rId3"/>
-          <a:stretch>
-            <a:fillRect/>
-          </a:stretch>
-        </p:blipFill>
-        <p:spPr>
-          <a:xfrm>
-            <a:off x="4708525" y="2971297"/>
-            <a:ext cx="3978275" cy="1739319"/>
-          </a:xfrm>
+          <a:prstGeom prst="rect">
+            <a:avLst/>
+          </a:prstGeom>
         </p:spPr>
       </p:pic>
     </p:spTree>
     <p:extLst>
       <p:ext uri="{BB962C8B-B14F-4D97-AF65-F5344CB8AC3E}">
-        <p14:creationId xmlns:p14="http://schemas.microsoft.com/office/powerpoint/2010/main" val="1785621135"/>
+        <p14:creationId xmlns:p14="http://schemas.microsoft.com/office/powerpoint/2010/main" val="3185519100"/>
       </p:ext>
     </p:extLst>
   </p:cSld>
